--- a/AI竞赛讲解_手机银行核心业务_优化版_v5.pptx
+++ b/AI竞赛讲解_手机银行核心业务_优化版_v5.pptx
@@ -514,9 +514,9 @@
           <a:p>
             <a:r>
               <a:rPr lang="en-US" dirty="0"/>
-              <a:t>【开场白，1分钟】
-各位评委好！今天我的分享分三部分：先看成果，再讲历程，最后谈反思。
-我们从一份需求文档起步，用AI原生研发方式完整构建了一个手机银行核心系统。这条路怎么走的？我们开始。</a:t>
+              <a:t>各位评委好。今天我分享的主题是“源于竞赛，不止于竞赛”——我们从一个AI竞赛出发，最终收获的却不只是竞赛本身。
+在短短几周内，我们用AI原生的研发方式，从零构建了一个完整的手机银行核心系统。更重要的，是在这个过程中，我们对“研发”这件事本身有了全新的理解。
+今天的分享分三个篇章：先看成果证明完成度，再听历程讲述方法，最后我们一起思考——AI时代，一个研发人员的核心竞争力究竟是什么。</a:t>
             </a:r>
             <a:endParaRPr lang="en-US" dirty="0"/>
           </a:p>
@@ -604,9 +604,7 @@
           <a:p>
             <a:r>
               <a:rPr lang="en-US" dirty="0"/>
-              <a:t>【挑战，1分钟】
-三个挑战。重点说前两个：意图识别的失败比例和AI代码的信任陷阱。
-"AI代码越漂亮越危险"——这听起来反直觉，但余额正负号案例就是最好的证明。</a:t>
+              <a:t>当然，过程中充满了挑战。我重点分享三个。第一个，AI意图识别精度——同一个意图有几十种不同的表达方式，边界情况层出不穷。真实数据是：成功调教一个意图，平均失败三到四次描述尝试。第二个，AI代码的业务校验——AI代码语法完美，正因为如此，更容易被信任，但业务语义可能是错的。第三个，前后端契约对齐——前后端由AI独立生成，天然存在契约断裂的风险。底部的这句话是我最深的感触：AI代码越漂亮，越需要警惕业务语义的错误。</a:t>
             </a:r>
             <a:endParaRPr lang="en-US" dirty="0"/>
           </a:p>
@@ -694,11 +692,7 @@
           <a:p>
             <a:r>
               <a:rPr lang="en-US" dirty="0"/>
-              <a:t>【认知升级，1分钟】
-这四条是从项目中真正沉淀下来的认知。
-第一条最重要——回到认知拐点的"文档是源代码"。
-第三条——规格表达能力比编码能力更值钱。
-第四条——从"把代码写对"到"让AI理解对"，这是核心转变。</a:t>
+              <a:t>每一个挑战的背后，都是一次认知的升级。这是四条递进式的重新理解。第一条也是最根本的——从“代码是产物”到“文档是产物”。代码变更只是文档变更的编译结果。第二条——从“AI写代码”到“AI理解业务”。AI最强的不是生成代码，而是理解文档后生成代码。第三条——从“编码能力”到“规格表达能力”。最有价值的不是写代码的速度，而是把业务规则精确描述给AI的能力。第四条——从“把代码写对”到“让AI理解对”。未来核心竞争力不是你会写什么代码，而是你能否让AI正确理解你要什么。</a:t>
             </a:r>
             <a:endParaRPr lang="en-US" dirty="0"/>
           </a:p>
@@ -786,8 +780,7 @@
           <a:p>
             <a:r>
               <a:rPr lang="en-US" dirty="0"/>
-              <a:t>【成果，1分钟】
-6个数据卡片。底部放了三张截图缩略作为"数据来源于这些真实界面"的视觉证据。</a:t>
+              <a:t>认知升级是内在的收获，但外在的成果同样重要。这六个数据卡片展示了项目的量化成果：三十多个API接口、八个数据库表、二十四个前端页面、七份专业文档、百分之七十以上的代码由AI生成、三个可插拔的MCP Skill。底部这三张截图就是数据的来源证据——AI对话截图、消费分析截图、首页截图。这些数据说明：AI原生研发不仅可行，而且能真正产出可用的产品。但正如前面所说，比数据更重要的，是我们在这一路上对研发认知的根本性升级。</a:t>
             </a:r>
             <a:endParaRPr lang="en-US" dirty="0"/>
           </a:p>
@@ -875,11 +868,7 @@
           <a:p>
             <a:r>
               <a:rPr lang="en-US" dirty="0"/>
-              <a:t>【收尾，1分钟】
-各位评委，今天我从三个部分分享了这次AI原生研发的实践：先展示了系统截图证明了完成度，再讲述了从痛点到方法论的心路历程，最后是四条认知升级。
-最后我有一个问题留给各位：如果AI能写70%的代码，那么一个优秀的研发人员的核心竞争力应该是什么？
-是写更快的代码？还是让AI更好地理解业务？
-谢谢大家，欢迎提问。</a:t>
+              <a:t>各位评委，今天我从三个篇章分享了这次AI原生研发的实践。如果AI能写百分之七十的代码，那么一个优秀的研发人员的核心竞争力应该是什么？是更快的编码速度，还是让AI更好地理解业务的能力？以前我们学习写代码，是为了让计算机理解我们的逻辑。现在我们学习写文档，是为了让AI理解我们的业务。这个转变，可能比我们想象的更加深刻。谢谢大家，欢迎提问。</a:t>
             </a:r>
             <a:endParaRPr lang="en-US" dirty="0"/>
           </a:p>
@@ -967,9 +956,7 @@
           <a:p>
             <a:r>
               <a:rPr lang="en-US" dirty="0"/>
-              <a:t>【目录，30秒】
-今天分三部分。第一，先看成果——系统到底长什么样，AI能力有多强。第二，再讲历程——我们是怎么做出来的，中间经历了什么。第三，最后谈反思——做完之后对研发的理解发生了什么变化。
-一句话：先证明系统存在，再讲创新故事，最后留思考。</a:t>
+              <a:t>三个篇章层层递进。第一篇，我先展示系统的真实截图——功能全景和三大AI创新能力，证明系统是真的跑起来了的。第二篇，我会讲述研发过程中最关键的转折点——我们是怎么从“让AI写代码”到“让AI理解业务”的。第三篇，我想把沉淀下来的认知升级分享给大家——因为比成果更重要的，是我们对研发这件事的理解发生了根本性的变化。</a:t>
             </a:r>
             <a:endParaRPr lang="en-US" dirty="0"/>
           </a:p>
@@ -1057,10 +1044,7 @@
           <a:p>
             <a:r>
               <a:rPr lang="en-US" dirty="0"/>
-              <a:t>【功能全景，1分钟】
-大家看左边——这是我们的系统首页，真实的运行截图。
-总资产 17万，五快捷功能，AI入口，银行卡管理——全部实现了。
-但这只是基础。接下来看我们的核心创新——AI能力。</a:t>
+              <a:t>先看成果。左侧是我们的系统首页——真实的运行截图。总资产十七万多，正负号清晰区分收支方向；五大快捷功能覆盖转账、查询、缴费等核心场景；两个AI能力入口内置在首页上。这不是概念设计，这是已经跑通的系统。十大功能模块、三十多个API接口、二十四个前端页面，全部由AI原生研发方式完成。接下来，我们看看核心创新——AI能力。</a:t>
             </a:r>
             <a:endParaRPr lang="en-US" dirty="0"/>
           </a:p>
@@ -1148,13 +1132,7 @@
           <a:p>
             <a:r>
               <a:rPr lang="en-US" dirty="0"/>
-              <a:t>【AI创新，1.5分钟】
-三大AI能力，每个都有真实截图。
-左边：智能客服——用户说"我要看我最近的消费记录"，AI理解意图，返回结构化交易列表。
-中间：消费分析——自动分类、AI洞察文案，比如"您本月最大支出为其他，占比38.5%"。
-右边：安全转账——用户说"转账给张三100块"，AI提取参数，两阶段确认。
-这三个截图证明：AI能力不是噱头，是真的能在实际场景中跑通。
-所有能力都基于后面会讲到的MCP-Skill架构。</a:t>
+              <a:t>三个AI能力，每个都有真实截图。左边是智能客服——用户说“我要看我最近的消费记录”，AI理解意图，返回结构化的交易列表。中间是消费分析——十大消费分类，两百多个关键词，自动生成月度洞察文案。右边是安全转账——用户说“转账给张三一百块”，AI提取参数，两阶段确认流程。每个能力都跑通了从用户输入到业务完成的全链路。所有能力都基于我们自研的MCP-Skill架构——大模型只负责理解和推理，业务操作通过Skill委托给后端API。</a:t>
             </a:r>
             <a:endParaRPr lang="en-US" dirty="0"/>
           </a:p>
@@ -1242,11 +1220,7 @@
           <a:p>
             <a:r>
               <a:rPr lang="en-US" dirty="0"/>
-              <a:t>【痛点，1分钟】
-系统你们看到了。那它是怎么做出来的？因为我们遇到了三个问题。
-痛点1：文档和代码分裂——这直接导致了认知拐点的发现。
-痛点2：重复CRUD——这也是为什么我们尝试让AI写代码。
-痛点3：沟通损耗——文档直接给AI，反而更精确。</a:t>
+              <a:t>系统你们看到了。但它是怎么做出来的？我们并不是一开始就带着方法论上路的。实际上，在这个项目之前，我们经历了三个典型的研发痛点。第一，需求和代码的分裂——需求一变，代码和文档立刻脱节。第二，大量时间花在重复的CRUD上，真正有价值的架构思考时间被压缩。第三，传统沟通链条太长——产品到文档到开发，层层理解产生偏差。这三个痛点促使我们去思考：有没有一个更好的研发方式？</a:t>
             </a:r>
             <a:endParaRPr lang="en-US" dirty="0"/>
           </a:p>
@@ -1334,11 +1308,7 @@
           <a:p>
             <a:r>
               <a:rPr lang="en-US" dirty="0"/>
-              <a:t>【认知拐点，1.5分钟】
-这个页面是整个项目最重要的一个顿悟。
-最开始做法是"让AI写代码→出BUG直接改代码"。但老BUG在新功能中反复出现。
-花了一天才发现：AI不是基于最新代码理解的——它是基于文档。
-从此改了规矩：先改文档，再生成代码。代码变更是文档变更的编译结果。</a:t>
+              <a:t>这一页是整个项目最重要的一个顿悟。最开始我们的做法很简单——让AI写代码，出BUG直接改代码。听起来很高效，对吧？但一个现象反复出现：修好的老BUG，在新功能中又冒出来了。花了一整天才意识到——AI不是基于我们最新代码来理解的，它是基于文档来理解的。你不改文档，AI根本不知道你做过什么修改。从那一刻起，规矩彻底变了：先改文档，再生成代码。代码变更，只是文档变更的编译结果。</a:t>
             </a:r>
             <a:endParaRPr lang="en-US" dirty="0"/>
           </a:p>
@@ -1426,9 +1396,7 @@
           <a:p>
             <a:r>
               <a:rPr lang="en-US" dirty="0"/>
-              <a:t>【调教方法论，1.5分钟】
-核心闭环：以文档为中心不断迭代。注意失败比例标注。
-下面是五条纪律，特别强调第4条——记录变更。右边是真实调教日志。</a:t>
+              <a:t>基于这个认知，我们形成了以文档为中心的闭环迭代法。核心模型在这一页：文档在中央，四个步骤不断循环——修改文档，AI生成代码，代码Review，发现问题，再回到修改文档。下面是我们从实操中沉淀的五条纪律：文档先行、增量变更、不改旧代码、记录变更、同步更新。每一条都是从真实的失败中总结出来的。最下面是我真实的调教日志节选——二六年四月二十五日，余额正负号问题。文档从“正数收入负数支出”改为“交易金额以方向符号标识，收入为正、支出为负”。就这一句话的改动，AI代码立刻正确。这就是文档驱动闭环的力量。</a:t>
             </a:r>
             <a:endParaRPr lang="en-US" dirty="0"/>
           </a:p>
@@ -1516,9 +1484,7 @@
           <a:p>
             <a:r>
               <a:rPr lang="en-US" dirty="0"/>
-              <a:t>【对比，1分钟】
-核心在最后两行：执行风险和设计风险的反转。
-传统最怕代码跑不通，AI写的语法一定对——但设计风险高了，最难的是精确告诉AI要什么。</a:t>
+              <a:t>这套方法与传统的研发方式到底有什么本质区别？看这张对比表。传统研发的核心产物是代码，人的角色是编码者。AI原生的核心产物是文档，人的角色变成了调教师和规格工程师。最微妙的是最后两行——执行风险和设计风险的逆转。AI写的代码语法一定是对的，所以执行风险降到了零。但设计风险却升高了——最难的事情变成了“如何精确告诉AI你要什么”。如果执行风险不再是问题，那你的核心竞争力究竟在哪里？</a:t>
             </a:r>
             <a:endParaRPr lang="en-US" dirty="0"/>
           </a:p>
@@ -1606,10 +1572,7 @@
           <a:p>
             <a:r>
               <a:rPr lang="en-US" dirty="0"/>
-              <a:t>【技术框架，1分钟】
-快速过。架构、MCP-Skill、安全、AI能力都在一页上。
-重点在底部的"信任陷阱"案例——余额正负号问题。
-AI代码语法完全正确，但业务语义是错的。这就是最危险的地方。</a:t>
+              <a:t>这套方法需要技术的支撑。我们采用了全栈架构，六层结构从客户端到数据持久化层。核心是中间这一层——我们自研的MCP-Skill引擎，实现了意图推理与业务执行的解耦。右侧是MCP-Skill的四个核心特性，特别强调第四点——LLM无关设计，当前这套规则未来可以切换任何大语言模型。底部的黄色区域是一个重要的信任陷阱案例：余额正负号问题。AI代码语法完全正确，但业务语义是错的——这是AI原生研发中最危险也最容易忽略的问题。</a:t>
             </a:r>
             <a:endParaRPr lang="en-US" dirty="0"/>
           </a:p>
@@ -3283,7 +3246,7 @@
                 <a:ea typeface="Arial" pitchFamily="34" charset="-122"/>
                 <a:cs typeface="Arial" pitchFamily="34" charset="-120"/>
               </a:rPr>
-              <a:t>每一个挑战，都是认知升级的来源</a:t>
+              <a:t>▸ 接下来：挑战之后沉淀的认知升级</a:t>
             </a:r>
             <a:endParaRPr lang="en-US" sz="1000" dirty="0"/>
           </a:p>
@@ -4203,7 +4166,7 @@
                 <a:ea typeface="Arial" pitchFamily="34" charset="-122"/>
                 <a:cs typeface="Arial" pitchFamily="34" charset="-120"/>
               </a:rPr>
-              <a:t>那实际成果呢？</a:t>
+              <a:t>▸ 接下来：量化成果与数据验证</a:t>
             </a:r>
             <a:endParaRPr lang="en-US" sz="1000" dirty="0"/>
           </a:p>
@@ -5385,8 +5348,8 @@
         </p:blipFill>
         <p:spPr>
           <a:xfrm>
-            <a:off x="457200" y="4572000"/>
-            <a:ext cx="914400" cy="1554480"/>
+            <a:off x="457200" y="4297680"/>
+            <a:ext cx="914400" cy="1463040"/>
           </a:xfrm>
           <a:prstGeom prst="rect">
             <a:avLst/>
@@ -5408,8 +5371,8 @@
         </p:blipFill>
         <p:spPr>
           <a:xfrm>
-            <a:off x="1554480" y="4572000"/>
-            <a:ext cx="914400" cy="1554480"/>
+            <a:off x="1554480" y="4297680"/>
+            <a:ext cx="914400" cy="1463040"/>
           </a:xfrm>
           <a:prstGeom prst="rect">
             <a:avLst/>
@@ -5431,8 +5394,8 @@
         </p:blipFill>
         <p:spPr>
           <a:xfrm>
-            <a:off x="2651760" y="4572000"/>
-            <a:ext cx="914400" cy="1554480"/>
+            <a:off x="2651760" y="4297680"/>
+            <a:ext cx="914400" cy="1463040"/>
           </a:xfrm>
           <a:prstGeom prst="rect">
             <a:avLst/>
@@ -5575,7 +5538,7 @@
                 <a:ea typeface="Arial" pitchFamily="34" charset="-122"/>
                 <a:cs typeface="Arial" pitchFamily="34" charset="-120"/>
               </a:rPr>
-              <a:t>回到最初的问题</a:t>
+              <a:t>▸ 接下来：回归本源</a:t>
             </a:r>
             <a:endParaRPr lang="en-US" sz="1000" dirty="0"/>
           </a:p>
@@ -6607,17 +6570,17 @@
               <a:buNone/>
             </a:pPr>
             <a:r>
-              <a:rPr lang="en-US" sz="1500" b="1" dirty="0">
-                <a:solidFill>
-                  <a:srgbClr val="4A90E2"/>
-                </a:solidFill>
-                <a:latin typeface="Arial" pitchFamily="34" charset="0"/>
-                <a:ea typeface="Arial" pitchFamily="34" charset="-122"/>
-                <a:cs typeface="Arial" pitchFamily="34" charset="-120"/>
-              </a:rPr>
-              <a:t>① 成果展示 → ② 研发历程 → ③ 反思与展望</a:t>
-            </a:r>
-            <a:endParaRPr lang="en-US" sz="1500" dirty="0"/>
+              <a:rPr lang="en-US" sz="1600" b="1" dirty="0">
+                <a:solidFill>
+                  <a:srgbClr val="1A5276"/>
+                </a:solidFill>
+                <a:latin typeface="Arial" pitchFamily="34" charset="0"/>
+                <a:ea typeface="Arial" pitchFamily="34" charset="-122"/>
+                <a:cs typeface="Arial" pitchFamily="34" charset="-120"/>
+              </a:rPr>
+              <a:t>三个篇章层层递进：先看成果、再听历程、最后共同思考</a:t>
+            </a:r>
+            <a:endParaRPr lang="en-US" sz="1600" dirty="0"/>
           </a:p>
         </p:txBody>
       </p:sp>
@@ -6654,7 +6617,7 @@
                 <a:ea typeface="Arial" pitchFamily="34" charset="-122"/>
                 <a:cs typeface="Arial" pitchFamily="34" charset="-120"/>
               </a:rPr>
-              <a:t>全程级20分钟，每部分相互呼应</a:t>
+              <a:t>Part 1 成果展示 · Part 2 研发历程 · Part 3 反思与展望</a:t>
             </a:r>
             <a:endParaRPr lang="en-US" sz="1100" dirty="0"/>
           </a:p>
@@ -7411,7 +7374,7 @@
                 <a:ea typeface="Arial" pitchFamily="34" charset="-122"/>
                 <a:cs typeface="Arial" pitchFamily="34" charset="-120"/>
               </a:rPr>
-              <a:t>不仅有完整系统，还有三大AI创新能力</a:t>
+              <a:t>▸ 接下来：AI创新三大能力的真实演示</a:t>
             </a:r>
             <a:endParaRPr lang="en-US" sz="1000" dirty="0"/>
           </a:p>
@@ -8233,7 +8196,7 @@
                 <a:ea typeface="Arial" pitchFamily="34" charset="-122"/>
                 <a:cs typeface="Arial" pitchFamily="34" charset="-120"/>
               </a:rPr>
-              <a:t>系统看到了，那它是怎么做出来的？</a:t>
+              <a:t>▸ 接下来：这些能力为什么会被创造出来？</a:t>
             </a:r>
             <a:endParaRPr lang="en-US" sz="1000" dirty="0"/>
           </a:p>
@@ -9148,7 +9111,7 @@
                 <a:ea typeface="Arial" pitchFamily="34" charset="-122"/>
                 <a:cs typeface="Arial" pitchFamily="34" charset="-120"/>
               </a:rPr>
-              <a:t>所以我们决定用AI原生研发测试一下</a:t>
+              <a:t>▸ 接下来：一次调教中的顿悟改变了方向</a:t>
             </a:r>
             <a:endParaRPr lang="en-US" sz="1000" dirty="0"/>
           </a:p>
@@ -9993,7 +9956,7 @@
                 <a:ea typeface="Arial" pitchFamily="34" charset="-122"/>
                 <a:cs typeface="Arial" pitchFamily="34" charset="-120"/>
               </a:rPr>
-              <a:t>那具体怎么调教？</a:t>
+              <a:t>▸ 接下来：基于这个认知，我们形成了闭环方法</a:t>
             </a:r>
             <a:endParaRPr lang="en-US" sz="1000" dirty="0"/>
           </a:p>
@@ -10123,7 +10086,7 @@
                 <a:ea typeface="Arial" pitchFamily="34" charset="-122"/>
                 <a:cs typeface="Arial" pitchFamily="34" charset="-120"/>
               </a:rPr>
-              <a:t>调教方法论</a:t>
+              <a:t>文档驱动闭环</a:t>
             </a:r>
             <a:endParaRPr lang="en-US" sz="2800" dirty="0"/>
           </a:p>
@@ -10162,7 +10125,7 @@
                 <a:ea typeface="Arial" pitchFamily="34" charset="-122"/>
                 <a:cs typeface="Arial" pitchFamily="34" charset="-120"/>
               </a:rPr>
-              <a:t>闭环迭代 + 五条纪律</a:t>
+              <a:t>以文档为中心的迭代闭环</a:t>
             </a:r>
             <a:endParaRPr lang="en-US" sz="1200" dirty="0"/>
           </a:p>
@@ -10300,7 +10263,7 @@
                 <a:ea typeface="Arial" pitchFamily="34" charset="-122"/>
                 <a:cs typeface="Arial" pitchFamily="34" charset="-120"/>
               </a:rPr>
-              <a:t>调教（修改文档）</a:t>
+              <a:t>修改文档</a:t>
             </a:r>
             <a:endParaRPr lang="en-US" sz="1000" dirty="0"/>
           </a:p>
@@ -10485,7 +10448,263 @@
       </p:sp>
       <p:sp>
         <p:nvSpPr>
-          <p:cNvPr id="16" name="Text 14"/>
+          <p:cNvPr id="16" name="Shape 14"/>
+          <p:cNvSpPr/>
+          <p:nvPr/>
+        </p:nvSpPr>
+        <p:spPr>
+          <a:xfrm>
+            <a:off x="7315200" y="502920"/>
+            <a:ext cx="1188720" cy="320040"/>
+          </a:xfrm>
+          <a:prstGeom prst="roundRect">
+            <a:avLst/>
+          </a:prstGeom>
+          <a:solidFill>
+            <a:srgbClr val="EBF5FB"/>
+          </a:solidFill>
+          <a:ln w="6350">
+            <a:solidFill>
+              <a:srgbClr val="4A90E2"/>
+            </a:solidFill>
+            <a:prstDash val="solid"/>
+          </a:ln>
+        </p:spPr>
+      </p:sp>
+      <p:sp>
+        <p:nvSpPr>
+          <p:cNvPr id="17" name="Text 15"/>
+          <p:cNvSpPr/>
+          <p:nvPr/>
+        </p:nvSpPr>
+        <p:spPr>
+          <a:xfrm>
+            <a:off x="7315200" y="502920"/>
+            <a:ext cx="1188720" cy="320040"/>
+          </a:xfrm>
+          <a:prstGeom prst="rect">
+            <a:avLst/>
+          </a:prstGeom>
+          <a:noFill/>
+          <a:ln/>
+        </p:spPr>
+        <p:txBody>
+          <a:bodyPr wrap="square" rtlCol="0" anchor="ctr"/>
+          <a:lstStyle/>
+          <a:p>
+            <a:pPr algn="ctr" indent="0" marL="0">
+              <a:buNone/>
+            </a:pPr>
+            <a:r>
+              <a:rPr lang="en-US" sz="1100" b="1" dirty="0">
+                <a:solidFill>
+                  <a:srgbClr val="2C3E50"/>
+                </a:solidFill>
+                <a:latin typeface="Arial" pitchFamily="34" charset="0"/>
+                <a:ea typeface="Arial" pitchFamily="34" charset="-122"/>
+                <a:cs typeface="Arial" pitchFamily="34" charset="-120"/>
+              </a:rPr>
+              <a:t>▶</a:t>
+            </a:r>
+            <a:endParaRPr lang="en-US" sz="1100" dirty="0"/>
+          </a:p>
+        </p:txBody>
+      </p:sp>
+      <p:sp>
+        <p:nvSpPr>
+          <p:cNvPr id="18" name="Shape 16"/>
+          <p:cNvSpPr/>
+          <p:nvPr/>
+        </p:nvSpPr>
+        <p:spPr>
+          <a:xfrm>
+            <a:off x="9601200" y="2103120"/>
+            <a:ext cx="320040" cy="822960"/>
+          </a:xfrm>
+          <a:prstGeom prst="roundRect">
+            <a:avLst/>
+          </a:prstGeom>
+          <a:solidFill>
+            <a:srgbClr val="EBF5FB"/>
+          </a:solidFill>
+          <a:ln w="6350">
+            <a:solidFill>
+              <a:srgbClr val="4A90E2"/>
+            </a:solidFill>
+            <a:prstDash val="solid"/>
+          </a:ln>
+        </p:spPr>
+      </p:sp>
+      <p:sp>
+        <p:nvSpPr>
+          <p:cNvPr id="19" name="Text 17"/>
+          <p:cNvSpPr/>
+          <p:nvPr/>
+        </p:nvSpPr>
+        <p:spPr>
+          <a:xfrm>
+            <a:off x="9601200" y="2103120"/>
+            <a:ext cx="320040" cy="822960"/>
+          </a:xfrm>
+          <a:prstGeom prst="rect">
+            <a:avLst/>
+          </a:prstGeom>
+          <a:noFill/>
+          <a:ln/>
+        </p:spPr>
+        <p:txBody>
+          <a:bodyPr wrap="square" rtlCol="0" anchor="ctr"/>
+          <a:lstStyle/>
+          <a:p>
+            <a:pPr algn="ctr" indent="0" marL="0">
+              <a:buNone/>
+            </a:pPr>
+            <a:r>
+              <a:rPr lang="en-US" sz="1100" b="1" dirty="0">
+                <a:solidFill>
+                  <a:srgbClr val="2C3E50"/>
+                </a:solidFill>
+                <a:latin typeface="Arial" pitchFamily="34" charset="0"/>
+                <a:ea typeface="Arial" pitchFamily="34" charset="-122"/>
+                <a:cs typeface="Arial" pitchFamily="34" charset="-120"/>
+              </a:rPr>
+              <a:t>▼</a:t>
+            </a:r>
+            <a:endParaRPr lang="en-US" sz="1100" dirty="0"/>
+          </a:p>
+        </p:txBody>
+      </p:sp>
+      <p:sp>
+        <p:nvSpPr>
+          <p:cNvPr id="20" name="Shape 18"/>
+          <p:cNvSpPr/>
+          <p:nvPr/>
+        </p:nvSpPr>
+        <p:spPr>
+          <a:xfrm>
+            <a:off x="3291840" y="3017520"/>
+            <a:ext cx="1188720" cy="320040"/>
+          </a:xfrm>
+          <a:prstGeom prst="roundRect">
+            <a:avLst/>
+          </a:prstGeom>
+          <a:solidFill>
+            <a:srgbClr val="EBF5FB"/>
+          </a:solidFill>
+          <a:ln w="6350">
+            <a:solidFill>
+              <a:srgbClr val="4A90E2"/>
+            </a:solidFill>
+            <a:prstDash val="solid"/>
+          </a:ln>
+        </p:spPr>
+      </p:sp>
+      <p:sp>
+        <p:nvSpPr>
+          <p:cNvPr id="21" name="Text 19"/>
+          <p:cNvSpPr/>
+          <p:nvPr/>
+        </p:nvSpPr>
+        <p:spPr>
+          <a:xfrm>
+            <a:off x="3291840" y="3017520"/>
+            <a:ext cx="1188720" cy="320040"/>
+          </a:xfrm>
+          <a:prstGeom prst="rect">
+            <a:avLst/>
+          </a:prstGeom>
+          <a:noFill/>
+          <a:ln/>
+        </p:spPr>
+        <p:txBody>
+          <a:bodyPr wrap="square" rtlCol="0" anchor="ctr"/>
+          <a:lstStyle/>
+          <a:p>
+            <a:pPr algn="ctr" indent="0" marL="0">
+              <a:buNone/>
+            </a:pPr>
+            <a:r>
+              <a:rPr lang="en-US" sz="1100" b="1" dirty="0">
+                <a:solidFill>
+                  <a:srgbClr val="2C3E50"/>
+                </a:solidFill>
+                <a:latin typeface="Arial" pitchFamily="34" charset="0"/>
+                <a:ea typeface="Arial" pitchFamily="34" charset="-122"/>
+                <a:cs typeface="Arial" pitchFamily="34" charset="-120"/>
+              </a:rPr>
+              <a:t>◀</a:t>
+            </a:r>
+            <a:endParaRPr lang="en-US" sz="1100" dirty="0"/>
+          </a:p>
+        </p:txBody>
+      </p:sp>
+      <p:sp>
+        <p:nvSpPr>
+          <p:cNvPr id="22" name="Shape 20"/>
+          <p:cNvSpPr/>
+          <p:nvPr/>
+        </p:nvSpPr>
+        <p:spPr>
+          <a:xfrm>
+            <a:off x="1828800" y="502920"/>
+            <a:ext cx="320040" cy="822960"/>
+          </a:xfrm>
+          <a:prstGeom prst="roundRect">
+            <a:avLst/>
+          </a:prstGeom>
+          <a:solidFill>
+            <a:srgbClr val="EBF5FB"/>
+          </a:solidFill>
+          <a:ln w="6350">
+            <a:solidFill>
+              <a:srgbClr val="4A90E2"/>
+            </a:solidFill>
+            <a:prstDash val="solid"/>
+          </a:ln>
+        </p:spPr>
+      </p:sp>
+      <p:sp>
+        <p:nvSpPr>
+          <p:cNvPr id="23" name="Text 21"/>
+          <p:cNvSpPr/>
+          <p:nvPr/>
+        </p:nvSpPr>
+        <p:spPr>
+          <a:xfrm>
+            <a:off x="1828800" y="502920"/>
+            <a:ext cx="320040" cy="822960"/>
+          </a:xfrm>
+          <a:prstGeom prst="rect">
+            <a:avLst/>
+          </a:prstGeom>
+          <a:noFill/>
+          <a:ln/>
+        </p:spPr>
+        <p:txBody>
+          <a:bodyPr wrap="square" rtlCol="0" anchor="ctr"/>
+          <a:lstStyle/>
+          <a:p>
+            <a:pPr algn="ctr" indent="0" marL="0">
+              <a:buNone/>
+            </a:pPr>
+            <a:r>
+              <a:rPr lang="en-US" sz="1100" b="1" dirty="0">
+                <a:solidFill>
+                  <a:srgbClr val="2C3E50"/>
+                </a:solidFill>
+                <a:latin typeface="Arial" pitchFamily="34" charset="0"/>
+                <a:ea typeface="Arial" pitchFamily="34" charset="-122"/>
+                <a:cs typeface="Arial" pitchFamily="34" charset="-120"/>
+              </a:rPr>
+              <a:t>▲</a:t>
+            </a:r>
+            <a:endParaRPr lang="en-US" sz="1100" dirty="0"/>
+          </a:p>
+        </p:txBody>
+      </p:sp>
+      <p:sp>
+        <p:nvSpPr>
+          <p:cNvPr id="24" name="Text 22"/>
           <p:cNvSpPr/>
           <p:nvPr/>
         </p:nvSpPr>
@@ -10524,7 +10743,7 @@
       </p:sp>
       <p:sp>
         <p:nvSpPr>
-          <p:cNvPr id="17" name="Shape 15"/>
+          <p:cNvPr id="25" name="Shape 23"/>
           <p:cNvSpPr/>
           <p:nvPr/>
         </p:nvSpPr>
@@ -10544,7 +10763,7 @@
       </p:sp>
       <p:sp>
         <p:nvSpPr>
-          <p:cNvPr id="18" name="Shape 16"/>
+          <p:cNvPr id="26" name="Shape 24"/>
           <p:cNvSpPr/>
           <p:nvPr/>
         </p:nvSpPr>
@@ -10564,7 +10783,7 @@
       </p:sp>
       <p:sp>
         <p:nvSpPr>
-          <p:cNvPr id="19" name="Text 17"/>
+          <p:cNvPr id="27" name="Text 25"/>
           <p:cNvSpPr/>
           <p:nvPr/>
         </p:nvSpPr>
@@ -10603,7 +10822,7 @@
       </p:sp>
       <p:sp>
         <p:nvSpPr>
-          <p:cNvPr id="20" name="Text 18"/>
+          <p:cNvPr id="28" name="Text 26"/>
           <p:cNvSpPr/>
           <p:nvPr/>
         </p:nvSpPr>
@@ -10642,7 +10861,7 @@
       </p:sp>
       <p:sp>
         <p:nvSpPr>
-          <p:cNvPr id="21" name="Text 19"/>
+          <p:cNvPr id="29" name="Text 27"/>
           <p:cNvSpPr/>
           <p:nvPr/>
         </p:nvSpPr>
@@ -10684,7 +10903,7 @@
       </p:sp>
       <p:sp>
         <p:nvSpPr>
-          <p:cNvPr id="22" name="Shape 20"/>
+          <p:cNvPr id="30" name="Shape 28"/>
           <p:cNvSpPr/>
           <p:nvPr/>
         </p:nvSpPr>
@@ -10704,7 +10923,7 @@
       </p:sp>
       <p:sp>
         <p:nvSpPr>
-          <p:cNvPr id="23" name="Text 21"/>
+          <p:cNvPr id="31" name="Text 29"/>
           <p:cNvSpPr/>
           <p:nvPr/>
         </p:nvSpPr>
@@ -10743,7 +10962,7 @@
       </p:sp>
       <p:sp>
         <p:nvSpPr>
-          <p:cNvPr id="24" name="Text 22"/>
+          <p:cNvPr id="32" name="Text 30"/>
           <p:cNvSpPr/>
           <p:nvPr/>
         </p:nvSpPr>
@@ -10782,7 +11001,7 @@
       </p:sp>
       <p:sp>
         <p:nvSpPr>
-          <p:cNvPr id="25" name="Text 23"/>
+          <p:cNvPr id="33" name="Text 31"/>
           <p:cNvSpPr/>
           <p:nvPr/>
         </p:nvSpPr>
@@ -10824,7 +11043,7 @@
       </p:sp>
       <p:sp>
         <p:nvSpPr>
-          <p:cNvPr id="26" name="Shape 24"/>
+          <p:cNvPr id="34" name="Shape 32"/>
           <p:cNvSpPr/>
           <p:nvPr/>
         </p:nvSpPr>
@@ -10844,7 +11063,7 @@
       </p:sp>
       <p:sp>
         <p:nvSpPr>
-          <p:cNvPr id="27" name="Text 25"/>
+          <p:cNvPr id="35" name="Text 33"/>
           <p:cNvSpPr/>
           <p:nvPr/>
         </p:nvSpPr>
@@ -10883,7 +11102,7 @@
       </p:sp>
       <p:sp>
         <p:nvSpPr>
-          <p:cNvPr id="28" name="Text 26"/>
+          <p:cNvPr id="36" name="Text 34"/>
           <p:cNvSpPr/>
           <p:nvPr/>
         </p:nvSpPr>
@@ -10922,7 +11141,7 @@
       </p:sp>
       <p:sp>
         <p:nvSpPr>
-          <p:cNvPr id="29" name="Text 27"/>
+          <p:cNvPr id="37" name="Text 35"/>
           <p:cNvSpPr/>
           <p:nvPr/>
         </p:nvSpPr>
@@ -10964,7 +11183,7 @@
       </p:sp>
       <p:sp>
         <p:nvSpPr>
-          <p:cNvPr id="30" name="Shape 28"/>
+          <p:cNvPr id="38" name="Shape 36"/>
           <p:cNvSpPr/>
           <p:nvPr/>
         </p:nvSpPr>
@@ -10984,7 +11203,7 @@
       </p:sp>
       <p:sp>
         <p:nvSpPr>
-          <p:cNvPr id="31" name="Text 29"/>
+          <p:cNvPr id="39" name="Text 37"/>
           <p:cNvSpPr/>
           <p:nvPr/>
         </p:nvSpPr>
@@ -11023,7 +11242,7 @@
       </p:sp>
       <p:sp>
         <p:nvSpPr>
-          <p:cNvPr id="32" name="Text 30"/>
+          <p:cNvPr id="40" name="Text 38"/>
           <p:cNvSpPr/>
           <p:nvPr/>
         </p:nvSpPr>
@@ -11062,7 +11281,7 @@
       </p:sp>
       <p:sp>
         <p:nvSpPr>
-          <p:cNvPr id="33" name="Text 31"/>
+          <p:cNvPr id="41" name="Text 39"/>
           <p:cNvSpPr/>
           <p:nvPr/>
         </p:nvSpPr>
@@ -11104,7 +11323,7 @@
       </p:sp>
       <p:sp>
         <p:nvSpPr>
-          <p:cNvPr id="34" name="Shape 32"/>
+          <p:cNvPr id="42" name="Shape 40"/>
           <p:cNvSpPr/>
           <p:nvPr/>
         </p:nvSpPr>
@@ -11124,7 +11343,7 @@
       </p:sp>
       <p:sp>
         <p:nvSpPr>
-          <p:cNvPr id="35" name="Text 33"/>
+          <p:cNvPr id="43" name="Text 41"/>
           <p:cNvSpPr/>
           <p:nvPr/>
         </p:nvSpPr>
@@ -11163,7 +11382,7 @@
       </p:sp>
       <p:sp>
         <p:nvSpPr>
-          <p:cNvPr id="36" name="Text 34"/>
+          <p:cNvPr id="44" name="Text 42"/>
           <p:cNvSpPr/>
           <p:nvPr/>
         </p:nvSpPr>
@@ -11202,7 +11421,7 @@
       </p:sp>
       <p:sp>
         <p:nvSpPr>
-          <p:cNvPr id="37" name="Text 35"/>
+          <p:cNvPr id="45" name="Text 43"/>
           <p:cNvSpPr/>
           <p:nvPr/>
         </p:nvSpPr>
@@ -11244,7 +11463,7 @@
       </p:sp>
       <p:sp>
         <p:nvSpPr>
-          <p:cNvPr id="38" name="Shape 36"/>
+          <p:cNvPr id="46" name="Shape 44"/>
           <p:cNvSpPr/>
           <p:nvPr/>
         </p:nvSpPr>
@@ -11269,7 +11488,7 @@
       </p:sp>
       <p:sp>
         <p:nvSpPr>
-          <p:cNvPr id="39" name="Text 37"/>
+          <p:cNvPr id="47" name="Text 45"/>
           <p:cNvSpPr/>
           <p:nvPr/>
         </p:nvSpPr>
@@ -11308,14 +11527,14 @@
       </p:sp>
       <p:sp>
         <p:nvSpPr>
-          <p:cNvPr id="40" name="Shape 38"/>
-          <p:cNvSpPr/>
-          <p:nvPr/>
-        </p:nvSpPr>
-        <p:spPr>
-          <a:xfrm>
-            <a:off x="731520" y="5852160"/>
-            <a:ext cx="10725912" cy="548640"/>
+          <p:cNvPr id="48" name="Shape 46"/>
+          <p:cNvSpPr/>
+          <p:nvPr/>
+        </p:nvSpPr>
+        <p:spPr>
+          <a:xfrm>
+            <a:off x="731520" y="5669280"/>
+            <a:ext cx="10725912" cy="457200"/>
           </a:xfrm>
           <a:prstGeom prst="roundRect">
             <a:avLst/>
@@ -11328,14 +11547,14 @@
       </p:sp>
       <p:sp>
         <p:nvSpPr>
-          <p:cNvPr id="41" name="Text 39"/>
-          <p:cNvSpPr/>
-          <p:nvPr/>
-        </p:nvSpPr>
-        <p:spPr>
-          <a:xfrm>
-            <a:off x="914400" y="5852160"/>
-            <a:ext cx="10360152" cy="548640"/>
+          <p:cNvPr id="49" name="Text 47"/>
+          <p:cNvSpPr/>
+          <p:nvPr/>
+        </p:nvSpPr>
+        <p:spPr>
+          <a:xfrm>
+            <a:off x="914400" y="5669280"/>
+            <a:ext cx="10360152" cy="457200"/>
           </a:xfrm>
           <a:prstGeom prst="rect">
             <a:avLst/>
@@ -11367,7 +11586,7 @@
       </p:sp>
       <p:sp>
         <p:nvSpPr>
-          <p:cNvPr id="42" name="Text 40"/>
+          <p:cNvPr id="50" name="Text 48"/>
           <p:cNvSpPr/>
           <p:nvPr/>
         </p:nvSpPr>
@@ -11398,7 +11617,7 @@
                 <a:ea typeface="Arial" pitchFamily="34" charset="-122"/>
                 <a:cs typeface="Arial" pitchFamily="34" charset="-120"/>
               </a:rPr>
-              <a:t>这样调教跟传统开发有什么本质不同？</a:t>
+              <a:t>▸ 接下来：新方法与传统的本质差异</a:t>
             </a:r>
             <a:endParaRPr lang="en-US" sz="1000" dirty="0"/>
           </a:p>
@@ -11406,7 +11625,7 @@
       </p:sp>
       <p:sp>
         <p:nvSpPr>
-          <p:cNvPr id="43" name="Text 41"/>
+          <p:cNvPr id="51" name="Text 49"/>
           <p:cNvSpPr/>
           <p:nvPr/>
         </p:nvSpPr>
@@ -13019,7 +13238,7 @@
                 <a:ea typeface="Arial" pitchFamily="34" charset="-122"/>
                 <a:cs typeface="Arial" pitchFamily="34" charset="-120"/>
               </a:rPr>
-              <a:t>这套方法需要什么技术支撑？</a:t>
+              <a:t>▸ 接下来：支撑方法的技术架构</a:t>
             </a:r>
             <a:endParaRPr lang="en-US" sz="1000" dirty="0"/>
           </a:p>
@@ -14385,7 +14604,7 @@
                 <a:ea typeface="Arial" pitchFamily="34" charset="-122"/>
                 <a:cs typeface="Arial" pitchFamily="34" charset="-120"/>
               </a:rPr>
-              <a:t>技术框架搭好了，但真正做起来才发现</a:t>
+              <a:t>▸ 接下来：理想与现实之间的三大挑战</a:t>
             </a:r>
             <a:endParaRPr lang="en-US" sz="1000" dirty="0"/>
           </a:p>
